--- a/全然向你(崇拜版).pptx
+++ b/全然向你(崇拜版).pptx
@@ -169,10 +169,9 @@
           <a:lstStyle/>
           <a:p>
             <a:r>
-              <a:rPr lang="zh-TW" altLang="en-US" smtClean="0"/>
+              <a:rPr lang="zh-TW" altLang="en-US"/>
               <a:t>按一下以編輯母片標題樣式</a:t>
             </a:r>
-            <a:endParaRPr lang="zh-TW" altLang="en-US"/>
           </a:p>
         </p:txBody>
       </p:sp>
@@ -288,10 +287,9 @@
           </a:lstStyle>
           <a:p>
             <a:r>
-              <a:rPr lang="zh-TW" altLang="en-US" smtClean="0"/>
+              <a:rPr lang="zh-TW" altLang="en-US"/>
               <a:t>按一下以編輯母片副標題樣式</a:t>
             </a:r>
-            <a:endParaRPr lang="zh-TW" altLang="en-US"/>
           </a:p>
         </p:txBody>
       </p:sp>
@@ -312,7 +310,7 @@
           <a:p>
             <a:fld id="{90E6F053-0252-461E-AE20-312307FEBCCD}" type="datetimeFigureOut">
               <a:rPr lang="zh-TW" altLang="en-US" smtClean="0"/>
-              <a:t>2022/9/17</a:t>
+              <a:t>2024/7/13</a:t>
             </a:fld>
             <a:endParaRPr lang="zh-TW" altLang="en-US"/>
           </a:p>
@@ -401,10 +399,9 @@
           <a:lstStyle/>
           <a:p>
             <a:r>
-              <a:rPr lang="zh-TW" altLang="en-US" smtClean="0"/>
+              <a:rPr lang="zh-TW" altLang="en-US"/>
               <a:t>按一下以編輯母片標題樣式</a:t>
             </a:r>
-            <a:endParaRPr lang="zh-TW" altLang="en-US"/>
           </a:p>
         </p:txBody>
       </p:sp>
@@ -425,38 +422,37 @@
           <a:p>
             <a:pPr lvl="0"/>
             <a:r>
-              <a:rPr lang="zh-TW" altLang="en-US" smtClean="0"/>
+              <a:rPr lang="zh-TW" altLang="en-US"/>
               <a:t>按一下以編輯母片文字樣式</a:t>
             </a:r>
           </a:p>
           <a:p>
             <a:pPr lvl="1"/>
             <a:r>
-              <a:rPr lang="zh-TW" altLang="en-US" smtClean="0"/>
+              <a:rPr lang="zh-TW" altLang="en-US"/>
               <a:t>第二層</a:t>
             </a:r>
           </a:p>
           <a:p>
             <a:pPr lvl="2"/>
             <a:r>
-              <a:rPr lang="zh-TW" altLang="en-US" smtClean="0"/>
+              <a:rPr lang="zh-TW" altLang="en-US"/>
               <a:t>第三層</a:t>
             </a:r>
           </a:p>
           <a:p>
             <a:pPr lvl="3"/>
             <a:r>
-              <a:rPr lang="zh-TW" altLang="en-US" smtClean="0"/>
+              <a:rPr lang="zh-TW" altLang="en-US"/>
               <a:t>第四層</a:t>
             </a:r>
           </a:p>
           <a:p>
             <a:pPr lvl="4"/>
             <a:r>
-              <a:rPr lang="zh-TW" altLang="en-US" smtClean="0"/>
+              <a:rPr lang="zh-TW" altLang="en-US"/>
               <a:t>第五層</a:t>
             </a:r>
-            <a:endParaRPr lang="zh-TW" altLang="en-US"/>
           </a:p>
         </p:txBody>
       </p:sp>
@@ -477,7 +473,7 @@
           <a:p>
             <a:fld id="{90E6F053-0252-461E-AE20-312307FEBCCD}" type="datetimeFigureOut">
               <a:rPr lang="zh-TW" altLang="en-US" smtClean="0"/>
-              <a:t>2022/9/17</a:t>
+              <a:t>2024/7/13</a:t>
             </a:fld>
             <a:endParaRPr lang="zh-TW" altLang="en-US"/>
           </a:p>
@@ -571,10 +567,9 @@
           <a:lstStyle/>
           <a:p>
             <a:r>
-              <a:rPr lang="zh-TW" altLang="en-US" smtClean="0"/>
+              <a:rPr lang="zh-TW" altLang="en-US"/>
               <a:t>按一下以編輯母片標題樣式</a:t>
             </a:r>
-            <a:endParaRPr lang="zh-TW" altLang="en-US"/>
           </a:p>
         </p:txBody>
       </p:sp>
@@ -600,38 +595,37 @@
           <a:p>
             <a:pPr lvl="0"/>
             <a:r>
-              <a:rPr lang="zh-TW" altLang="en-US" smtClean="0"/>
+              <a:rPr lang="zh-TW" altLang="en-US"/>
               <a:t>按一下以編輯母片文字樣式</a:t>
             </a:r>
           </a:p>
           <a:p>
             <a:pPr lvl="1"/>
             <a:r>
-              <a:rPr lang="zh-TW" altLang="en-US" smtClean="0"/>
+              <a:rPr lang="zh-TW" altLang="en-US"/>
               <a:t>第二層</a:t>
             </a:r>
           </a:p>
           <a:p>
             <a:pPr lvl="2"/>
             <a:r>
-              <a:rPr lang="zh-TW" altLang="en-US" smtClean="0"/>
+              <a:rPr lang="zh-TW" altLang="en-US"/>
               <a:t>第三層</a:t>
             </a:r>
           </a:p>
           <a:p>
             <a:pPr lvl="3"/>
             <a:r>
-              <a:rPr lang="zh-TW" altLang="en-US" smtClean="0"/>
+              <a:rPr lang="zh-TW" altLang="en-US"/>
               <a:t>第四層</a:t>
             </a:r>
           </a:p>
           <a:p>
             <a:pPr lvl="4"/>
             <a:r>
-              <a:rPr lang="zh-TW" altLang="en-US" smtClean="0"/>
+              <a:rPr lang="zh-TW" altLang="en-US"/>
               <a:t>第五層</a:t>
             </a:r>
-            <a:endParaRPr lang="zh-TW" altLang="en-US"/>
           </a:p>
         </p:txBody>
       </p:sp>
@@ -652,7 +646,7 @@
           <a:p>
             <a:fld id="{90E6F053-0252-461E-AE20-312307FEBCCD}" type="datetimeFigureOut">
               <a:rPr lang="zh-TW" altLang="en-US" smtClean="0"/>
-              <a:t>2022/9/17</a:t>
+              <a:t>2024/7/13</a:t>
             </a:fld>
             <a:endParaRPr lang="zh-TW" altLang="en-US"/>
           </a:p>
@@ -741,10 +735,9 @@
           <a:lstStyle/>
           <a:p>
             <a:r>
-              <a:rPr lang="zh-TW" altLang="en-US" smtClean="0"/>
+              <a:rPr lang="zh-TW" altLang="en-US"/>
               <a:t>按一下以編輯母片標題樣式</a:t>
             </a:r>
-            <a:endParaRPr lang="zh-TW" altLang="en-US"/>
           </a:p>
         </p:txBody>
       </p:sp>
@@ -765,38 +758,37 @@
           <a:p>
             <a:pPr lvl="0"/>
             <a:r>
-              <a:rPr lang="zh-TW" altLang="en-US" smtClean="0"/>
+              <a:rPr lang="zh-TW" altLang="en-US"/>
               <a:t>按一下以編輯母片文字樣式</a:t>
             </a:r>
           </a:p>
           <a:p>
             <a:pPr lvl="1"/>
             <a:r>
-              <a:rPr lang="zh-TW" altLang="en-US" smtClean="0"/>
+              <a:rPr lang="zh-TW" altLang="en-US"/>
               <a:t>第二層</a:t>
             </a:r>
           </a:p>
           <a:p>
             <a:pPr lvl="2"/>
             <a:r>
-              <a:rPr lang="zh-TW" altLang="en-US" smtClean="0"/>
+              <a:rPr lang="zh-TW" altLang="en-US"/>
               <a:t>第三層</a:t>
             </a:r>
           </a:p>
           <a:p>
             <a:pPr lvl="3"/>
             <a:r>
-              <a:rPr lang="zh-TW" altLang="en-US" smtClean="0"/>
+              <a:rPr lang="zh-TW" altLang="en-US"/>
               <a:t>第四層</a:t>
             </a:r>
           </a:p>
           <a:p>
             <a:pPr lvl="4"/>
             <a:r>
-              <a:rPr lang="zh-TW" altLang="en-US" smtClean="0"/>
+              <a:rPr lang="zh-TW" altLang="en-US"/>
               <a:t>第五層</a:t>
             </a:r>
-            <a:endParaRPr lang="zh-TW" altLang="en-US"/>
           </a:p>
         </p:txBody>
       </p:sp>
@@ -817,7 +809,7 @@
           <a:p>
             <a:fld id="{90E6F053-0252-461E-AE20-312307FEBCCD}" type="datetimeFigureOut">
               <a:rPr lang="zh-TW" altLang="en-US" smtClean="0"/>
-              <a:t>2022/9/17</a:t>
+              <a:t>2024/7/13</a:t>
             </a:fld>
             <a:endParaRPr lang="zh-TW" altLang="en-US"/>
           </a:p>
@@ -915,10 +907,9 @@
           </a:lstStyle>
           <a:p>
             <a:r>
-              <a:rPr lang="zh-TW" altLang="en-US" smtClean="0"/>
+              <a:rPr lang="zh-TW" altLang="en-US"/>
               <a:t>按一下以編輯母片標題樣式</a:t>
             </a:r>
-            <a:endParaRPr lang="zh-TW" altLang="en-US"/>
           </a:p>
         </p:txBody>
       </p:sp>
@@ -1035,7 +1026,7 @@
           <a:p>
             <a:pPr lvl="0"/>
             <a:r>
-              <a:rPr lang="zh-TW" altLang="en-US" smtClean="0"/>
+              <a:rPr lang="zh-TW" altLang="en-US"/>
               <a:t>按一下以編輯母片文字樣式</a:t>
             </a:r>
           </a:p>
@@ -1058,7 +1049,7 @@
           <a:p>
             <a:fld id="{90E6F053-0252-461E-AE20-312307FEBCCD}" type="datetimeFigureOut">
               <a:rPr lang="zh-TW" altLang="en-US" smtClean="0"/>
-              <a:t>2022/9/17</a:t>
+              <a:t>2024/7/13</a:t>
             </a:fld>
             <a:endParaRPr lang="zh-TW" altLang="en-US"/>
           </a:p>
@@ -1147,10 +1138,9 @@
           <a:lstStyle/>
           <a:p>
             <a:r>
-              <a:rPr lang="zh-TW" altLang="en-US" smtClean="0"/>
+              <a:rPr lang="zh-TW" altLang="en-US"/>
               <a:t>按一下以編輯母片標題樣式</a:t>
             </a:r>
-            <a:endParaRPr lang="zh-TW" altLang="en-US"/>
           </a:p>
         </p:txBody>
       </p:sp>
@@ -1204,38 +1194,37 @@
           <a:p>
             <a:pPr lvl="0"/>
             <a:r>
-              <a:rPr lang="zh-TW" altLang="en-US" smtClean="0"/>
+              <a:rPr lang="zh-TW" altLang="en-US"/>
               <a:t>按一下以編輯母片文字樣式</a:t>
             </a:r>
           </a:p>
           <a:p>
             <a:pPr lvl="1"/>
             <a:r>
-              <a:rPr lang="zh-TW" altLang="en-US" smtClean="0"/>
+              <a:rPr lang="zh-TW" altLang="en-US"/>
               <a:t>第二層</a:t>
             </a:r>
           </a:p>
           <a:p>
             <a:pPr lvl="2"/>
             <a:r>
-              <a:rPr lang="zh-TW" altLang="en-US" smtClean="0"/>
+              <a:rPr lang="zh-TW" altLang="en-US"/>
               <a:t>第三層</a:t>
             </a:r>
           </a:p>
           <a:p>
             <a:pPr lvl="3"/>
             <a:r>
-              <a:rPr lang="zh-TW" altLang="en-US" smtClean="0"/>
+              <a:rPr lang="zh-TW" altLang="en-US"/>
               <a:t>第四層</a:t>
             </a:r>
           </a:p>
           <a:p>
             <a:pPr lvl="4"/>
             <a:r>
-              <a:rPr lang="zh-TW" altLang="en-US" smtClean="0"/>
+              <a:rPr lang="zh-TW" altLang="en-US"/>
               <a:t>第五層</a:t>
             </a:r>
-            <a:endParaRPr lang="zh-TW" altLang="en-US"/>
           </a:p>
         </p:txBody>
       </p:sp>
@@ -1289,38 +1278,37 @@
           <a:p>
             <a:pPr lvl="0"/>
             <a:r>
-              <a:rPr lang="zh-TW" altLang="en-US" smtClean="0"/>
+              <a:rPr lang="zh-TW" altLang="en-US"/>
               <a:t>按一下以編輯母片文字樣式</a:t>
             </a:r>
           </a:p>
           <a:p>
             <a:pPr lvl="1"/>
             <a:r>
-              <a:rPr lang="zh-TW" altLang="en-US" smtClean="0"/>
+              <a:rPr lang="zh-TW" altLang="en-US"/>
               <a:t>第二層</a:t>
             </a:r>
           </a:p>
           <a:p>
             <a:pPr lvl="2"/>
             <a:r>
-              <a:rPr lang="zh-TW" altLang="en-US" smtClean="0"/>
+              <a:rPr lang="zh-TW" altLang="en-US"/>
               <a:t>第三層</a:t>
             </a:r>
           </a:p>
           <a:p>
             <a:pPr lvl="3"/>
             <a:r>
-              <a:rPr lang="zh-TW" altLang="en-US" smtClean="0"/>
+              <a:rPr lang="zh-TW" altLang="en-US"/>
               <a:t>第四層</a:t>
             </a:r>
           </a:p>
           <a:p>
             <a:pPr lvl="4"/>
             <a:r>
-              <a:rPr lang="zh-TW" altLang="en-US" smtClean="0"/>
+              <a:rPr lang="zh-TW" altLang="en-US"/>
               <a:t>第五層</a:t>
             </a:r>
-            <a:endParaRPr lang="zh-TW" altLang="en-US"/>
           </a:p>
         </p:txBody>
       </p:sp>
@@ -1341,7 +1329,7 @@
           <a:p>
             <a:fld id="{90E6F053-0252-461E-AE20-312307FEBCCD}" type="datetimeFigureOut">
               <a:rPr lang="zh-TW" altLang="en-US" smtClean="0"/>
-              <a:t>2022/9/17</a:t>
+              <a:t>2024/7/13</a:t>
             </a:fld>
             <a:endParaRPr lang="zh-TW" altLang="en-US"/>
           </a:p>
@@ -1434,10 +1422,9 @@
           </a:lstStyle>
           <a:p>
             <a:r>
-              <a:rPr lang="zh-TW" altLang="en-US" smtClean="0"/>
+              <a:rPr lang="zh-TW" altLang="en-US"/>
               <a:t>按一下以編輯母片標題樣式</a:t>
             </a:r>
-            <a:endParaRPr lang="zh-TW" altLang="en-US"/>
           </a:p>
         </p:txBody>
       </p:sp>
@@ -1500,7 +1487,7 @@
           <a:p>
             <a:pPr lvl="0"/>
             <a:r>
-              <a:rPr lang="zh-TW" altLang="en-US" smtClean="0"/>
+              <a:rPr lang="zh-TW" altLang="en-US"/>
               <a:t>按一下以編輯母片文字樣式</a:t>
             </a:r>
           </a:p>
@@ -1556,38 +1543,37 @@
           <a:p>
             <a:pPr lvl="0"/>
             <a:r>
-              <a:rPr lang="zh-TW" altLang="en-US" smtClean="0"/>
+              <a:rPr lang="zh-TW" altLang="en-US"/>
               <a:t>按一下以編輯母片文字樣式</a:t>
             </a:r>
           </a:p>
           <a:p>
             <a:pPr lvl="1"/>
             <a:r>
-              <a:rPr lang="zh-TW" altLang="en-US" smtClean="0"/>
+              <a:rPr lang="zh-TW" altLang="en-US"/>
               <a:t>第二層</a:t>
             </a:r>
           </a:p>
           <a:p>
             <a:pPr lvl="2"/>
             <a:r>
-              <a:rPr lang="zh-TW" altLang="en-US" smtClean="0"/>
+              <a:rPr lang="zh-TW" altLang="en-US"/>
               <a:t>第三層</a:t>
             </a:r>
           </a:p>
           <a:p>
             <a:pPr lvl="3"/>
             <a:r>
-              <a:rPr lang="zh-TW" altLang="en-US" smtClean="0"/>
+              <a:rPr lang="zh-TW" altLang="en-US"/>
               <a:t>第四層</a:t>
             </a:r>
           </a:p>
           <a:p>
             <a:pPr lvl="4"/>
             <a:r>
-              <a:rPr lang="zh-TW" altLang="en-US" smtClean="0"/>
+              <a:rPr lang="zh-TW" altLang="en-US"/>
               <a:t>第五層</a:t>
             </a:r>
-            <a:endParaRPr lang="zh-TW" altLang="en-US"/>
           </a:p>
         </p:txBody>
       </p:sp>
@@ -1650,7 +1636,7 @@
           <a:p>
             <a:pPr lvl="0"/>
             <a:r>
-              <a:rPr lang="zh-TW" altLang="en-US" smtClean="0"/>
+              <a:rPr lang="zh-TW" altLang="en-US"/>
               <a:t>按一下以編輯母片文字樣式</a:t>
             </a:r>
           </a:p>
@@ -1706,38 +1692,37 @@
           <a:p>
             <a:pPr lvl="0"/>
             <a:r>
-              <a:rPr lang="zh-TW" altLang="en-US" smtClean="0"/>
+              <a:rPr lang="zh-TW" altLang="en-US"/>
               <a:t>按一下以編輯母片文字樣式</a:t>
             </a:r>
           </a:p>
           <a:p>
             <a:pPr lvl="1"/>
             <a:r>
-              <a:rPr lang="zh-TW" altLang="en-US" smtClean="0"/>
+              <a:rPr lang="zh-TW" altLang="en-US"/>
               <a:t>第二層</a:t>
             </a:r>
           </a:p>
           <a:p>
             <a:pPr lvl="2"/>
             <a:r>
-              <a:rPr lang="zh-TW" altLang="en-US" smtClean="0"/>
+              <a:rPr lang="zh-TW" altLang="en-US"/>
               <a:t>第三層</a:t>
             </a:r>
           </a:p>
           <a:p>
             <a:pPr lvl="3"/>
             <a:r>
-              <a:rPr lang="zh-TW" altLang="en-US" smtClean="0"/>
+              <a:rPr lang="zh-TW" altLang="en-US"/>
               <a:t>第四層</a:t>
             </a:r>
           </a:p>
           <a:p>
             <a:pPr lvl="4"/>
             <a:r>
-              <a:rPr lang="zh-TW" altLang="en-US" smtClean="0"/>
+              <a:rPr lang="zh-TW" altLang="en-US"/>
               <a:t>第五層</a:t>
             </a:r>
-            <a:endParaRPr lang="zh-TW" altLang="en-US"/>
           </a:p>
         </p:txBody>
       </p:sp>
@@ -1758,7 +1743,7 @@
           <a:p>
             <a:fld id="{90E6F053-0252-461E-AE20-312307FEBCCD}" type="datetimeFigureOut">
               <a:rPr lang="zh-TW" altLang="en-US" smtClean="0"/>
-              <a:t>2022/9/17</a:t>
+              <a:t>2024/7/13</a:t>
             </a:fld>
             <a:endParaRPr lang="zh-TW" altLang="en-US"/>
           </a:p>
@@ -1847,10 +1832,9 @@
           <a:lstStyle/>
           <a:p>
             <a:r>
-              <a:rPr lang="zh-TW" altLang="en-US" smtClean="0"/>
+              <a:rPr lang="zh-TW" altLang="en-US"/>
               <a:t>按一下以編輯母片標題樣式</a:t>
             </a:r>
-            <a:endParaRPr lang="zh-TW" altLang="en-US"/>
           </a:p>
         </p:txBody>
       </p:sp>
@@ -1871,7 +1855,7 @@
           <a:p>
             <a:fld id="{90E6F053-0252-461E-AE20-312307FEBCCD}" type="datetimeFigureOut">
               <a:rPr lang="zh-TW" altLang="en-US" smtClean="0"/>
-              <a:t>2022/9/17</a:t>
+              <a:t>2024/7/13</a:t>
             </a:fld>
             <a:endParaRPr lang="zh-TW" altLang="en-US"/>
           </a:p>
@@ -1961,7 +1945,7 @@
           <a:p>
             <a:fld id="{90E6F053-0252-461E-AE20-312307FEBCCD}" type="datetimeFigureOut">
               <a:rPr lang="zh-TW" altLang="en-US" smtClean="0"/>
-              <a:t>2022/9/17</a:t>
+              <a:t>2024/7/13</a:t>
             </a:fld>
             <a:endParaRPr lang="zh-TW" altLang="en-US"/>
           </a:p>
@@ -2059,10 +2043,9 @@
           </a:lstStyle>
           <a:p>
             <a:r>
-              <a:rPr lang="zh-TW" altLang="en-US" smtClean="0"/>
+              <a:rPr lang="zh-TW" altLang="en-US"/>
               <a:t>按一下以編輯母片標題樣式</a:t>
             </a:r>
-            <a:endParaRPr lang="zh-TW" altLang="en-US"/>
           </a:p>
         </p:txBody>
       </p:sp>
@@ -2116,38 +2099,37 @@
           <a:p>
             <a:pPr lvl="0"/>
             <a:r>
-              <a:rPr lang="zh-TW" altLang="en-US" smtClean="0"/>
+              <a:rPr lang="zh-TW" altLang="en-US"/>
               <a:t>按一下以編輯母片文字樣式</a:t>
             </a:r>
           </a:p>
           <a:p>
             <a:pPr lvl="1"/>
             <a:r>
-              <a:rPr lang="zh-TW" altLang="en-US" smtClean="0"/>
+              <a:rPr lang="zh-TW" altLang="en-US"/>
               <a:t>第二層</a:t>
             </a:r>
           </a:p>
           <a:p>
             <a:pPr lvl="2"/>
             <a:r>
-              <a:rPr lang="zh-TW" altLang="en-US" smtClean="0"/>
+              <a:rPr lang="zh-TW" altLang="en-US"/>
               <a:t>第三層</a:t>
             </a:r>
           </a:p>
           <a:p>
             <a:pPr lvl="3"/>
             <a:r>
-              <a:rPr lang="zh-TW" altLang="en-US" smtClean="0"/>
+              <a:rPr lang="zh-TW" altLang="en-US"/>
               <a:t>第四層</a:t>
             </a:r>
           </a:p>
           <a:p>
             <a:pPr lvl="4"/>
             <a:r>
-              <a:rPr lang="zh-TW" altLang="en-US" smtClean="0"/>
+              <a:rPr lang="zh-TW" altLang="en-US"/>
               <a:t>第五層</a:t>
             </a:r>
-            <a:endParaRPr lang="zh-TW" altLang="en-US"/>
           </a:p>
         </p:txBody>
       </p:sp>
@@ -2210,7 +2192,7 @@
           <a:p>
             <a:pPr lvl="0"/>
             <a:r>
-              <a:rPr lang="zh-TW" altLang="en-US" smtClean="0"/>
+              <a:rPr lang="zh-TW" altLang="en-US"/>
               <a:t>按一下以編輯母片文字樣式</a:t>
             </a:r>
           </a:p>
@@ -2233,7 +2215,7 @@
           <a:p>
             <a:fld id="{90E6F053-0252-461E-AE20-312307FEBCCD}" type="datetimeFigureOut">
               <a:rPr lang="zh-TW" altLang="en-US" smtClean="0"/>
-              <a:t>2022/9/17</a:t>
+              <a:t>2024/7/13</a:t>
             </a:fld>
             <a:endParaRPr lang="zh-TW" altLang="en-US"/>
           </a:p>
@@ -2331,10 +2313,9 @@
           </a:lstStyle>
           <a:p>
             <a:r>
-              <a:rPr lang="zh-TW" altLang="en-US" smtClean="0"/>
+              <a:rPr lang="zh-TW" altLang="en-US"/>
               <a:t>按一下以編輯母片標題樣式</a:t>
             </a:r>
-            <a:endParaRPr lang="zh-TW" altLang="en-US"/>
           </a:p>
         </p:txBody>
       </p:sp>
@@ -2396,10 +2377,9 @@
           </a:lstStyle>
           <a:p>
             <a:r>
-              <a:rPr lang="zh-TW" altLang="en-US" smtClean="0"/>
+              <a:rPr lang="zh-TW" altLang="en-US"/>
               <a:t>按一下圖示以新增圖片</a:t>
             </a:r>
-            <a:endParaRPr lang="zh-TW" altLang="en-US"/>
           </a:p>
         </p:txBody>
       </p:sp>
@@ -2462,7 +2442,7 @@
           <a:p>
             <a:pPr lvl="0"/>
             <a:r>
-              <a:rPr lang="zh-TW" altLang="en-US" smtClean="0"/>
+              <a:rPr lang="zh-TW" altLang="en-US"/>
               <a:t>按一下以編輯母片文字樣式</a:t>
             </a:r>
           </a:p>
@@ -2485,7 +2465,7 @@
           <a:p>
             <a:fld id="{90E6F053-0252-461E-AE20-312307FEBCCD}" type="datetimeFigureOut">
               <a:rPr lang="zh-TW" altLang="en-US" smtClean="0"/>
-              <a:t>2022/9/17</a:t>
+              <a:t>2024/7/13</a:t>
             </a:fld>
             <a:endParaRPr lang="zh-TW" altLang="en-US"/>
           </a:p>
@@ -2594,10 +2574,9 @@
           <a:lstStyle/>
           <a:p>
             <a:r>
-              <a:rPr lang="zh-TW" altLang="en-US" smtClean="0"/>
+              <a:rPr lang="zh-TW" altLang="en-US"/>
               <a:t>按一下以編輯母片標題樣式</a:t>
             </a:r>
-            <a:endParaRPr lang="zh-TW" altLang="en-US"/>
           </a:p>
         </p:txBody>
       </p:sp>
@@ -2628,38 +2607,37 @@
           <a:p>
             <a:pPr lvl="0"/>
             <a:r>
-              <a:rPr lang="zh-TW" altLang="en-US" smtClean="0"/>
+              <a:rPr lang="zh-TW" altLang="en-US"/>
               <a:t>按一下以編輯母片文字樣式</a:t>
             </a:r>
           </a:p>
           <a:p>
             <a:pPr lvl="1"/>
             <a:r>
-              <a:rPr lang="zh-TW" altLang="en-US" smtClean="0"/>
+              <a:rPr lang="zh-TW" altLang="en-US"/>
               <a:t>第二層</a:t>
             </a:r>
           </a:p>
           <a:p>
             <a:pPr lvl="2"/>
             <a:r>
-              <a:rPr lang="zh-TW" altLang="en-US" smtClean="0"/>
+              <a:rPr lang="zh-TW" altLang="en-US"/>
               <a:t>第三層</a:t>
             </a:r>
           </a:p>
           <a:p>
             <a:pPr lvl="3"/>
             <a:r>
-              <a:rPr lang="zh-TW" altLang="en-US" smtClean="0"/>
+              <a:rPr lang="zh-TW" altLang="en-US"/>
               <a:t>第四層</a:t>
             </a:r>
           </a:p>
           <a:p>
             <a:pPr lvl="4"/>
             <a:r>
-              <a:rPr lang="zh-TW" altLang="en-US" smtClean="0"/>
+              <a:rPr lang="zh-TW" altLang="en-US"/>
               <a:t>第五層</a:t>
             </a:r>
-            <a:endParaRPr lang="zh-TW" altLang="en-US"/>
           </a:p>
         </p:txBody>
       </p:sp>
@@ -2698,7 +2676,7 @@
           <a:p>
             <a:fld id="{90E6F053-0252-461E-AE20-312307FEBCCD}" type="datetimeFigureOut">
               <a:rPr lang="zh-TW" altLang="en-US" smtClean="0"/>
-              <a:t>2022/9/17</a:t>
+              <a:t>2024/7/13</a:t>
             </a:fld>
             <a:endParaRPr lang="zh-TW" altLang="en-US"/>
           </a:p>
@@ -3122,7 +3100,7 @@
                 <a:latin typeface="微軟正黑體" pitchFamily="34" charset="-120"/>
                 <a:ea typeface="微軟正黑體" pitchFamily="34" charset="-120"/>
               </a:rPr>
-              <a:t>袮</a:t>
+              <a:t>祢</a:t>
             </a:r>
             <a:endParaRPr lang="zh-TW" altLang="en-US" sz="7200" b="1" i="1" dirty="0">
               <a:solidFill>
@@ -3236,7 +3214,7 @@
                 <a:latin typeface="微軟正黑體" pitchFamily="34" charset="-120"/>
                 <a:ea typeface="微軟正黑體" pitchFamily="34" charset="-120"/>
               </a:rPr>
-              <a:t>袮</a:t>
+              <a:t>祢</a:t>
             </a:r>
             <a:endParaRPr lang="en-US" altLang="zh-TW" sz="6400" b="1" dirty="0">
               <a:solidFill>
@@ -3257,7 +3235,7 @@
         <p:spPr>
           <a:xfrm>
             <a:off x="11765" y="5157192"/>
-            <a:ext cx="12180235" cy="646331"/>
+            <a:ext cx="12180235" cy="584775"/>
           </a:xfrm>
           <a:prstGeom prst="rect">
             <a:avLst/>
@@ -3272,7 +3250,7 @@
           <a:p>
             <a:pPr algn="ctr"/>
             <a:r>
-              <a:rPr lang="en-US" sz="3600" b="1" dirty="0" smtClean="0">
+              <a:rPr lang="en-US" sz="3200" b="1" dirty="0">
                 <a:solidFill>
                   <a:srgbClr val="660033"/>
                 </a:solidFill>
@@ -3282,17 +3260,17 @@
               <a:t>( </a:t>
             </a:r>
             <a:r>
-              <a:rPr lang="zh-CN" altLang="en-US" sz="3600" b="1" dirty="0" smtClean="0">
+              <a:rPr lang="zh-CN" altLang="en-US" sz="3200" b="1" dirty="0">
                 <a:solidFill>
                   <a:srgbClr val="660033"/>
                 </a:solidFill>
                 <a:latin typeface="Microsoft JhengHei" panose="020B0604030504040204" pitchFamily="34" charset="-120"/>
                 <a:ea typeface="Microsoft JhengHei" panose="020B0604030504040204" pitchFamily="34" charset="-120"/>
               </a:rPr>
-              <a:t>正</a:t>
-            </a:r>
-            <a:r>
-              <a:rPr lang="en-US" sz="3600" b="1" dirty="0" smtClean="0">
+              <a:t>正歌</a:t>
+            </a:r>
+            <a:r>
+              <a:rPr lang="en-US" sz="3200" b="1" dirty="0">
                 <a:solidFill>
                   <a:srgbClr val="660033"/>
                 </a:solidFill>
@@ -3301,7 +3279,7 @@
               </a:rPr>
               <a:t> )</a:t>
             </a:r>
-            <a:endParaRPr lang="vi-VN" sz="3600" b="1" dirty="0">
+            <a:endParaRPr lang="vi-VN" sz="3200" b="1" dirty="0">
               <a:solidFill>
                 <a:srgbClr val="660033"/>
               </a:solidFill>
@@ -3409,7 +3387,7 @@
         <p:spPr>
           <a:xfrm>
             <a:off x="11765" y="5157192"/>
-            <a:ext cx="12180235" cy="646331"/>
+            <a:ext cx="12180235" cy="584775"/>
           </a:xfrm>
           <a:prstGeom prst="rect">
             <a:avLst/>
@@ -3424,7 +3402,7 @@
           <a:p>
             <a:pPr algn="ctr"/>
             <a:r>
-              <a:rPr lang="en-US" sz="3600" b="1" dirty="0" smtClean="0">
+              <a:rPr lang="en-US" sz="3200" b="1" dirty="0">
                 <a:solidFill>
                   <a:srgbClr val="660033"/>
                 </a:solidFill>
@@ -3434,17 +3412,17 @@
               <a:t>( </a:t>
             </a:r>
             <a:r>
-              <a:rPr lang="zh-CN" altLang="en-US" sz="3600" b="1" dirty="0" smtClean="0">
+              <a:rPr lang="zh-CN" altLang="en-US" sz="3200" b="1" dirty="0">
                 <a:solidFill>
                   <a:srgbClr val="660033"/>
                 </a:solidFill>
                 <a:latin typeface="Microsoft JhengHei" panose="020B0604030504040204" pitchFamily="34" charset="-120"/>
                 <a:ea typeface="Microsoft JhengHei" panose="020B0604030504040204" pitchFamily="34" charset="-120"/>
               </a:rPr>
-              <a:t>正</a:t>
-            </a:r>
-            <a:r>
-              <a:rPr lang="en-US" sz="3600" b="1" dirty="0" smtClean="0">
+              <a:t>正歌</a:t>
+            </a:r>
+            <a:r>
+              <a:rPr lang="en-US" sz="3200" b="1" dirty="0">
                 <a:solidFill>
                   <a:srgbClr val="660033"/>
                 </a:solidFill>
@@ -3453,7 +3431,7 @@
               </a:rPr>
               <a:t> )</a:t>
             </a:r>
-            <a:endParaRPr lang="vi-VN" sz="3600" b="1" dirty="0">
+            <a:endParaRPr lang="vi-VN" sz="3200" b="1" dirty="0">
               <a:solidFill>
                 <a:srgbClr val="660033"/>
               </a:solidFill>
@@ -3568,7 +3546,7 @@
         <p:spPr>
           <a:xfrm>
             <a:off x="11765" y="5157192"/>
-            <a:ext cx="12180235" cy="646331"/>
+            <a:ext cx="12180235" cy="584775"/>
           </a:xfrm>
           <a:prstGeom prst="rect">
             <a:avLst/>
@@ -3583,7 +3561,7 @@
           <a:p>
             <a:pPr algn="ctr"/>
             <a:r>
-              <a:rPr lang="en-US" sz="3600" b="1" dirty="0" smtClean="0">
+              <a:rPr lang="en-US" sz="3200" b="1" dirty="0">
                 <a:solidFill>
                   <a:srgbClr val="660033"/>
                 </a:solidFill>
@@ -3593,17 +3571,17 @@
               <a:t>( </a:t>
             </a:r>
             <a:r>
-              <a:rPr lang="zh-CN" altLang="en-US" sz="3600" b="1" dirty="0" smtClean="0">
+              <a:rPr lang="zh-CN" altLang="en-US" sz="3200" b="1" dirty="0">
                 <a:solidFill>
                   <a:srgbClr val="660033"/>
                 </a:solidFill>
                 <a:latin typeface="Microsoft JhengHei" panose="020B0604030504040204" pitchFamily="34" charset="-120"/>
                 <a:ea typeface="Microsoft JhengHei" panose="020B0604030504040204" pitchFamily="34" charset="-120"/>
               </a:rPr>
-              <a:t>正</a:t>
-            </a:r>
-            <a:r>
-              <a:rPr lang="en-US" sz="3600" b="1" dirty="0" smtClean="0">
+              <a:t>正歌</a:t>
+            </a:r>
+            <a:r>
+              <a:rPr lang="en-US" sz="3200" b="1" dirty="0">
                 <a:solidFill>
                   <a:srgbClr val="660033"/>
                 </a:solidFill>
@@ -3612,7 +3590,7 @@
               </a:rPr>
               <a:t> )</a:t>
             </a:r>
-            <a:endParaRPr lang="vi-VN" sz="3600" b="1" dirty="0">
+            <a:endParaRPr lang="vi-VN" sz="3200" b="1" dirty="0">
               <a:solidFill>
                 <a:srgbClr val="660033"/>
               </a:solidFill>
@@ -3720,7 +3698,7 @@
         <p:spPr>
           <a:xfrm>
             <a:off x="11765" y="5157192"/>
-            <a:ext cx="12180235" cy="646331"/>
+            <a:ext cx="12180235" cy="584775"/>
           </a:xfrm>
           <a:prstGeom prst="rect">
             <a:avLst/>
@@ -3735,7 +3713,7 @@
           <a:p>
             <a:pPr algn="ctr"/>
             <a:r>
-              <a:rPr lang="en-US" sz="3600" b="1" dirty="0" smtClean="0">
+              <a:rPr lang="en-US" sz="3200" b="1" dirty="0">
                 <a:solidFill>
                   <a:srgbClr val="660033"/>
                 </a:solidFill>
@@ -3745,17 +3723,17 @@
               <a:t>( </a:t>
             </a:r>
             <a:r>
-              <a:rPr lang="zh-CN" altLang="en-US" sz="3600" b="1" dirty="0" smtClean="0">
+              <a:rPr lang="zh-CN" altLang="en-US" sz="3200" b="1" dirty="0">
                 <a:solidFill>
                   <a:srgbClr val="660033"/>
                 </a:solidFill>
                 <a:latin typeface="Microsoft JhengHei" panose="020B0604030504040204" pitchFamily="34" charset="-120"/>
                 <a:ea typeface="Microsoft JhengHei" panose="020B0604030504040204" pitchFamily="34" charset="-120"/>
               </a:rPr>
-              <a:t>正</a:t>
-            </a:r>
-            <a:r>
-              <a:rPr lang="en-US" sz="3600" b="1" dirty="0" smtClean="0">
+              <a:t>正歌</a:t>
+            </a:r>
+            <a:r>
+              <a:rPr lang="en-US" sz="3200" b="1" dirty="0">
                 <a:solidFill>
                   <a:srgbClr val="660033"/>
                 </a:solidFill>
@@ -3764,7 +3742,7 @@
               </a:rPr>
               <a:t> )</a:t>
             </a:r>
-            <a:endParaRPr lang="vi-VN" sz="3600" b="1" dirty="0">
+            <a:endParaRPr lang="vi-VN" sz="3200" b="1" dirty="0">
               <a:solidFill>
                 <a:srgbClr val="660033"/>
               </a:solidFill>
@@ -3846,7 +3824,7 @@
                 <a:latin typeface="微軟正黑體" pitchFamily="34" charset="-120"/>
                 <a:ea typeface="微軟正黑體" pitchFamily="34" charset="-120"/>
               </a:rPr>
-              <a:t>袮</a:t>
+              <a:t>祢</a:t>
             </a:r>
             <a:r>
               <a:rPr lang="zh-TW" altLang="en-US" sz="6400" b="1" dirty="0">
@@ -3899,7 +3877,7 @@
         <p:spPr>
           <a:xfrm>
             <a:off x="11765" y="5157192"/>
-            <a:ext cx="12180235" cy="646331"/>
+            <a:ext cx="12180235" cy="584775"/>
           </a:xfrm>
           <a:prstGeom prst="rect">
             <a:avLst/>
@@ -3914,7 +3892,7 @@
           <a:p>
             <a:pPr algn="ctr"/>
             <a:r>
-              <a:rPr lang="en-US" sz="3600" b="1" dirty="0" smtClean="0">
+              <a:rPr lang="en-US" sz="3200" b="1" dirty="0">
                 <a:solidFill>
                   <a:srgbClr val="660033"/>
                 </a:solidFill>
@@ -3924,36 +3902,26 @@
               <a:t>( </a:t>
             </a:r>
             <a:r>
-              <a:rPr lang="zh-CN" altLang="en-US" sz="3600" b="1" dirty="0" smtClean="0">
+              <a:rPr lang="zh-CN" altLang="en-US" sz="3200" b="1" dirty="0">
                 <a:solidFill>
                   <a:srgbClr val="660033"/>
                 </a:solidFill>
                 <a:latin typeface="Microsoft JhengHei" panose="020B0604030504040204" pitchFamily="34" charset="-120"/>
                 <a:ea typeface="Microsoft JhengHei" panose="020B0604030504040204" pitchFamily="34" charset="-120"/>
               </a:rPr>
-              <a:t>副</a:t>
-            </a:r>
-            <a:r>
-              <a:rPr lang="en-US" sz="3600" b="1" dirty="0" smtClean="0">
+              <a:t>副歌</a:t>
+            </a:r>
+            <a:r>
+              <a:rPr lang="en-US" sz="3200" b="1" dirty="0">
                 <a:solidFill>
                   <a:srgbClr val="660033"/>
                 </a:solidFill>
                 <a:latin typeface="Microsoft JhengHei" panose="020B0604030504040204" pitchFamily="34" charset="-120"/>
                 <a:ea typeface="Microsoft JhengHei" panose="020B0604030504040204" pitchFamily="34" charset="-120"/>
               </a:rPr>
-              <a:t> </a:t>
-            </a:r>
-            <a:r>
-              <a:rPr lang="en-US" sz="3600" b="1" dirty="0" smtClean="0">
-                <a:solidFill>
-                  <a:srgbClr val="660033"/>
-                </a:solidFill>
-                <a:latin typeface="Microsoft JhengHei" panose="020B0604030504040204" pitchFamily="34" charset="-120"/>
-                <a:ea typeface="Microsoft JhengHei" panose="020B0604030504040204" pitchFamily="34" charset="-120"/>
-              </a:rPr>
-              <a:t>)</a:t>
-            </a:r>
-            <a:endParaRPr lang="vi-VN" sz="3600" b="1" dirty="0">
+              <a:t> )</a:t>
+            </a:r>
+            <a:endParaRPr lang="vi-VN" sz="3200" b="1" dirty="0">
               <a:solidFill>
                 <a:srgbClr val="660033"/>
               </a:solidFill>
@@ -4046,7 +4014,7 @@
         <p:spPr>
           <a:xfrm>
             <a:off x="11765" y="5157192"/>
-            <a:ext cx="12180235" cy="646331"/>
+            <a:ext cx="12180235" cy="584775"/>
           </a:xfrm>
           <a:prstGeom prst="rect">
             <a:avLst/>
@@ -4061,7 +4029,7 @@
           <a:p>
             <a:pPr algn="ctr"/>
             <a:r>
-              <a:rPr lang="en-US" sz="3600" b="1" dirty="0" smtClean="0">
+              <a:rPr lang="en-US" sz="3200" b="1" dirty="0">
                 <a:solidFill>
                   <a:srgbClr val="660033"/>
                 </a:solidFill>
@@ -4071,36 +4039,26 @@
               <a:t>( </a:t>
             </a:r>
             <a:r>
-              <a:rPr lang="zh-CN" altLang="en-US" sz="3600" b="1" dirty="0" smtClean="0">
+              <a:rPr lang="zh-CN" altLang="en-US" sz="3200" b="1" dirty="0">
                 <a:solidFill>
                   <a:srgbClr val="660033"/>
                 </a:solidFill>
                 <a:latin typeface="Microsoft JhengHei" panose="020B0604030504040204" pitchFamily="34" charset="-120"/>
                 <a:ea typeface="Microsoft JhengHei" panose="020B0604030504040204" pitchFamily="34" charset="-120"/>
               </a:rPr>
-              <a:t>副</a:t>
-            </a:r>
-            <a:r>
-              <a:rPr lang="en-US" sz="3600" b="1" dirty="0" smtClean="0">
+              <a:t>副歌</a:t>
+            </a:r>
+            <a:r>
+              <a:rPr lang="en-US" sz="3200" b="1" dirty="0">
                 <a:solidFill>
                   <a:srgbClr val="660033"/>
                 </a:solidFill>
                 <a:latin typeface="Microsoft JhengHei" panose="020B0604030504040204" pitchFamily="34" charset="-120"/>
                 <a:ea typeface="Microsoft JhengHei" panose="020B0604030504040204" pitchFamily="34" charset="-120"/>
               </a:rPr>
-              <a:t> </a:t>
-            </a:r>
-            <a:r>
-              <a:rPr lang="en-US" sz="3600" b="1" dirty="0" smtClean="0">
-                <a:solidFill>
-                  <a:srgbClr val="660033"/>
-                </a:solidFill>
-                <a:latin typeface="Microsoft JhengHei" panose="020B0604030504040204" pitchFamily="34" charset="-120"/>
-                <a:ea typeface="Microsoft JhengHei" panose="020B0604030504040204" pitchFamily="34" charset="-120"/>
-              </a:rPr>
-              <a:t>)</a:t>
-            </a:r>
-            <a:endParaRPr lang="vi-VN" sz="3600" b="1" dirty="0">
+              <a:t> )</a:t>
+            </a:r>
+            <a:endParaRPr lang="vi-VN" sz="3200" b="1" dirty="0">
               <a:solidFill>
                 <a:srgbClr val="660033"/>
               </a:solidFill>
@@ -4182,7 +4140,7 @@
                 <a:latin typeface="微軟正黑體" pitchFamily="34" charset="-120"/>
                 <a:ea typeface="微軟正黑體" pitchFamily="34" charset="-120"/>
               </a:rPr>
-              <a:t>袮</a:t>
+              <a:t>祢</a:t>
             </a:r>
             <a:r>
               <a:rPr lang="zh-TW" altLang="en-US" sz="6400" b="1" dirty="0">
@@ -4235,7 +4193,7 @@
         <p:spPr>
           <a:xfrm>
             <a:off x="11765" y="5157192"/>
-            <a:ext cx="12180235" cy="646331"/>
+            <a:ext cx="12180235" cy="584775"/>
           </a:xfrm>
           <a:prstGeom prst="rect">
             <a:avLst/>
@@ -4250,7 +4208,7 @@
           <a:p>
             <a:pPr algn="ctr"/>
             <a:r>
-              <a:rPr lang="en-US" sz="3600" b="1" dirty="0" smtClean="0">
+              <a:rPr lang="en-US" sz="3200" b="1" dirty="0">
                 <a:solidFill>
                   <a:srgbClr val="660033"/>
                 </a:solidFill>
@@ -4260,36 +4218,26 @@
               <a:t>( </a:t>
             </a:r>
             <a:r>
-              <a:rPr lang="zh-CN" altLang="en-US" sz="3600" b="1" dirty="0" smtClean="0">
+              <a:rPr lang="zh-CN" altLang="en-US" sz="3200" b="1" dirty="0">
                 <a:solidFill>
                   <a:srgbClr val="660033"/>
                 </a:solidFill>
                 <a:latin typeface="Microsoft JhengHei" panose="020B0604030504040204" pitchFamily="34" charset="-120"/>
                 <a:ea typeface="Microsoft JhengHei" panose="020B0604030504040204" pitchFamily="34" charset="-120"/>
               </a:rPr>
-              <a:t>副</a:t>
-            </a:r>
-            <a:r>
-              <a:rPr lang="en-US" sz="3600" b="1" dirty="0" smtClean="0">
+              <a:t>副歌</a:t>
+            </a:r>
+            <a:r>
+              <a:rPr lang="en-US" sz="3200" b="1" dirty="0">
                 <a:solidFill>
                   <a:srgbClr val="660033"/>
                 </a:solidFill>
                 <a:latin typeface="Microsoft JhengHei" panose="020B0604030504040204" pitchFamily="34" charset="-120"/>
                 <a:ea typeface="Microsoft JhengHei" panose="020B0604030504040204" pitchFamily="34" charset="-120"/>
               </a:rPr>
-              <a:t> </a:t>
-            </a:r>
-            <a:r>
-              <a:rPr lang="en-US" sz="3600" b="1" dirty="0" smtClean="0">
-                <a:solidFill>
-                  <a:srgbClr val="660033"/>
-                </a:solidFill>
-                <a:latin typeface="Microsoft JhengHei" panose="020B0604030504040204" pitchFamily="34" charset="-120"/>
-                <a:ea typeface="Microsoft JhengHei" panose="020B0604030504040204" pitchFamily="34" charset="-120"/>
-              </a:rPr>
-              <a:t>)</a:t>
-            </a:r>
-            <a:endParaRPr lang="vi-VN" sz="3600" b="1" dirty="0">
+              <a:t> )</a:t>
+            </a:r>
+            <a:endParaRPr lang="vi-VN" sz="3200" b="1" dirty="0">
               <a:solidFill>
                 <a:srgbClr val="660033"/>
               </a:solidFill>
@@ -4375,7 +4323,7 @@
         <p:spPr>
           <a:xfrm>
             <a:off x="11765" y="5157192"/>
-            <a:ext cx="12180235" cy="646331"/>
+            <a:ext cx="12180235" cy="584775"/>
           </a:xfrm>
           <a:prstGeom prst="rect">
             <a:avLst/>
@@ -4390,7 +4338,7 @@
           <a:p>
             <a:pPr algn="ctr"/>
             <a:r>
-              <a:rPr lang="en-US" sz="3600" b="1" dirty="0" smtClean="0">
+              <a:rPr lang="en-US" sz="3200" b="1" dirty="0">
                 <a:solidFill>
                   <a:srgbClr val="660033"/>
                 </a:solidFill>
@@ -4400,36 +4348,26 @@
               <a:t>( </a:t>
             </a:r>
             <a:r>
-              <a:rPr lang="zh-CN" altLang="en-US" sz="3600" b="1" dirty="0" smtClean="0">
+              <a:rPr lang="zh-CN" altLang="en-US" sz="3200" b="1" dirty="0">
                 <a:solidFill>
                   <a:srgbClr val="660033"/>
                 </a:solidFill>
                 <a:latin typeface="Microsoft JhengHei" panose="020B0604030504040204" pitchFamily="34" charset="-120"/>
                 <a:ea typeface="Microsoft JhengHei" panose="020B0604030504040204" pitchFamily="34" charset="-120"/>
               </a:rPr>
-              <a:t>副</a:t>
-            </a:r>
-            <a:r>
-              <a:rPr lang="en-US" sz="3600" b="1" dirty="0" smtClean="0">
+              <a:t>副歌</a:t>
+            </a:r>
+            <a:r>
+              <a:rPr lang="en-US" sz="3200" b="1" dirty="0">
                 <a:solidFill>
                   <a:srgbClr val="660033"/>
                 </a:solidFill>
                 <a:latin typeface="Microsoft JhengHei" panose="020B0604030504040204" pitchFamily="34" charset="-120"/>
                 <a:ea typeface="Microsoft JhengHei" panose="020B0604030504040204" pitchFamily="34" charset="-120"/>
               </a:rPr>
-              <a:t> </a:t>
-            </a:r>
-            <a:r>
-              <a:rPr lang="en-US" sz="3600" b="1" dirty="0" smtClean="0">
-                <a:solidFill>
-                  <a:srgbClr val="660033"/>
-                </a:solidFill>
-                <a:latin typeface="Microsoft JhengHei" panose="020B0604030504040204" pitchFamily="34" charset="-120"/>
-                <a:ea typeface="Microsoft JhengHei" panose="020B0604030504040204" pitchFamily="34" charset="-120"/>
-              </a:rPr>
-              <a:t>)</a:t>
-            </a:r>
-            <a:endParaRPr lang="vi-VN" sz="3600" b="1" dirty="0">
+              <a:t> )</a:t>
+            </a:r>
+            <a:endParaRPr lang="vi-VN" sz="3200" b="1" dirty="0">
               <a:solidFill>
                 <a:srgbClr val="660033"/>
               </a:solidFill>
